--- a/assets/pptx/catalog-33.pptx
+++ b/assets/pptx/catalog-33.pptx
@@ -3252,7 +3252,7 @@
                 <a:ea typeface="Ebrima"/>
                 <a:cs typeface="Ebrima"/>
               </a:rPr>
-              <a:t>የኢየሱስ ደም ዛሬም ትኩስ ነው (2X) አማላጄ ነው</a:t>
+              <a:t>የኢየሱስ ደም ዛሬም ትኩስ ነው 2X አማላጄ ነው</a:t>
             </a:r>
           </a:p>
           <a:p>
@@ -3270,7 +3270,7 @@
                 <a:ea typeface="Ebrima"/>
                 <a:cs typeface="Ebrima"/>
               </a:rPr>
-              <a:t>የጌታዬ ደም ዛሬም ትኩስ ነው (2X) አማላጄ ነው</a:t>
+              <a:t>የጌታዬ ደም ዛሬም ትኩስ ነው 2X አማላጄ ነው</a:t>
             </a:r>
           </a:p>
         </p:txBody>
@@ -3548,7 +3548,7 @@
                 <a:ea typeface="Ebrima"/>
                 <a:cs typeface="Ebrima"/>
               </a:rPr>
-              <a:t>ስለ ኃጢያቴ ጥብቅና በአብ ፊት የቆመልኝ (2x)</a:t>
+              <a:t>ስለ ኃጢያቴ ጥብቅና በአብ ፊት የቆመልኝ 2x</a:t>
             </a:r>
           </a:p>
         </p:txBody>
@@ -3615,7 +3615,7 @@
                 <a:ea typeface="Ebrima"/>
                 <a:cs typeface="Ebrima"/>
               </a:rPr>
-              <a:t>የኢየሱስ ደም ዛሬም ትኩስ ነው (2X) አማላጄ ነው</a:t>
+              <a:t>የኢየሱስ ደም ዛሬም ትኩስ ነው 2X አማላጄ ነው</a:t>
             </a:r>
           </a:p>
           <a:p>
@@ -3633,7 +3633,7 @@
                 <a:ea typeface="Ebrima"/>
                 <a:cs typeface="Ebrima"/>
               </a:rPr>
-              <a:t>የጌታዬ ደም ዛሬም ትኩስ ነው (2X) አማላጄ ነው</a:t>
+              <a:t>የጌታዬ ደም ዛሬም ትኩስ ነው 2X አማላጄ ነው</a:t>
             </a:r>
           </a:p>
         </p:txBody>
@@ -3700,7 +3700,7 @@
                 <a:ea typeface="Ebrima"/>
                 <a:cs typeface="Ebrima"/>
               </a:rPr>
-              <a:t>የኢየሱስ ደም ዛሬም ትኩስ ነው (2X) አማላጄ ነው</a:t>
+              <a:t>የኢየሱስ ደም ዛሬም ትኩስ ነው 2X አማላጄ ነው</a:t>
             </a:r>
           </a:p>
           <a:p>
@@ -3718,7 +3718,7 @@
                 <a:ea typeface="Ebrima"/>
                 <a:cs typeface="Ebrima"/>
               </a:rPr>
-              <a:t>የጌታዬ ደም ዛሬም ትኩስ ነው (2X) አማላጄ ነው</a:t>
+              <a:t>የጌታዬ ደም ዛሬም ትኩስ ነው 2X አማላጄ ነው</a:t>
             </a:r>
           </a:p>
         </p:txBody>
@@ -3803,7 +3803,7 @@
                 <a:ea typeface="Ebrima"/>
                 <a:cs typeface="Ebrima"/>
               </a:rPr>
-              <a:t>ይዞት ወደቀ ወደ ጥፋት (2X)</a:t>
+              <a:t>ይዞት ወደቀ ወደ ጥፋት 2X</a:t>
             </a:r>
           </a:p>
         </p:txBody>
@@ -3973,7 +3973,7 @@
                 <a:ea typeface="Ebrima"/>
                 <a:cs typeface="Ebrima"/>
               </a:rPr>
-              <a:t>ሞቴን ሞተልኝ ሰጠኝ ሂወት (2X)</a:t>
+              <a:t>ሞቴን ሞተልኝ ሰጠኝ ሂወት 2X</a:t>
             </a:r>
           </a:p>
           <a:p>
@@ -4269,7 +4269,7 @@
                 <a:ea typeface="Ebrima"/>
                 <a:cs typeface="Ebrima"/>
               </a:rPr>
-              <a:t>የኢየሱስ ደም ዛሬም ትኩስ ነው (2X) አማላጄ ነው</a:t>
+              <a:t>የኢየሱስ ደም ዛሬም ትኩስ ነው 2X አማላጄ ነው</a:t>
             </a:r>
           </a:p>
           <a:p>
@@ -4287,7 +4287,7 @@
                 <a:ea typeface="Ebrima"/>
                 <a:cs typeface="Ebrima"/>
               </a:rPr>
-              <a:t>የጌታዬ ደም ዛሬም ትኩስ ነው (2X) አማላጄ ነው</a:t>
+              <a:t>የጌታዬ ደም ዛሬም ትኩስ ነው 2X አማላጄ ነው</a:t>
             </a:r>
           </a:p>
         </p:txBody>
@@ -4565,7 +4565,7 @@
                 <a:ea typeface="Ebrima"/>
                 <a:cs typeface="Ebrima"/>
               </a:rPr>
-              <a:t>ስለ ኃጢያቴ ጥብቅና በአብ ፊት የቆመልኝ (2x)</a:t>
+              <a:t>ስለ ኃጢያቴ ጥብቅና በአብ ፊት የቆመልኝ 2x</a:t>
             </a:r>
           </a:p>
         </p:txBody>
